--- a/E1 - EDA/Presentacion_E1_IA.pptx
+++ b/E1 - EDA/Presentacion_E1_IA.pptx
@@ -363,7 +363,7 @@
                   </a:defRPr>
                 </a:pPr>
                 <a:r>
-                  <a:rPr b="0" i="0" u="none" strike="noStrike">
+                  <a:rPr lang="es-CL" b="0" i="0" u="none" strike="noStrike">
                     <a:solidFill>
                       <a:srgbClr val="000000"/>
                     </a:solidFill>
@@ -663,7 +663,7 @@
                   </a:defRPr>
                 </a:pPr>
                 <a:r>
-                  <a:rPr b="0" i="0" u="none" strike="noStrike">
+                  <a:rPr lang="es-CL" b="0" i="0" u="none" strike="noStrike">
                     <a:solidFill>
                       <a:srgbClr val="000000"/>
                     </a:solidFill>
@@ -969,7 +969,7 @@
                   </a:defRPr>
                 </a:pPr>
                 <a:r>
-                  <a:rPr b="0" i="0" u="none" strike="noStrike">
+                  <a:rPr lang="es-CL" b="0" i="0" u="none" strike="noStrike">
                     <a:solidFill>
                       <a:srgbClr val="000000"/>
                     </a:solidFill>
@@ -1247,7 +1247,7 @@
                   </a:defRPr>
                 </a:pPr>
                 <a:r>
-                  <a:rPr b="0" i="0" u="none" strike="noStrike">
+                  <a:rPr lang="es-CL" b="0" i="0" u="none" strike="noStrike">
                     <a:solidFill>
                       <a:srgbClr val="000000"/>
                     </a:solidFill>
@@ -3830,8 +3830,8 @@
         </p:nvSpPr>
         <p:spPr>
           <a:xfrm>
-            <a:off x="9692640" y="-1645920"/>
-            <a:ext cx="4754880" cy="4754880"/>
+            <a:off x="10079420" y="-1645920"/>
+            <a:ext cx="4368099" cy="4315548"/>
           </a:xfrm>
           <a:prstGeom prst="ellipse">
             <a:avLst/>
@@ -3954,17 +3954,6 @@
             <a:pPr marL="0" indent="0">
               <a:buNone/>
             </a:pPr>
-            <a:r>
-              <a:rPr lang="en-US" sz="1300" b="1" kern="0" spc="250" dirty="0">
-                <a:solidFill>
-                  <a:srgbClr val="F2A541"/>
-                </a:solidFill>
-                <a:latin typeface="Calibri" pitchFamily="34" charset="0"/>
-                <a:ea typeface="Calibri" pitchFamily="34" charset="-122"/>
-                <a:cs typeface="Calibri" pitchFamily="34" charset="-120"/>
-              </a:rPr>
-              <a:t>EVALUACIÓN 1 · CALIDAD Y PREPARACIÓN DE DATOS</a:t>
-            </a:r>
             <a:endParaRPr lang="en-US" sz="1300" dirty="0"/>
           </a:p>
         </p:txBody>
@@ -3977,7 +3966,7 @@
         </p:nvSpPr>
         <p:spPr>
           <a:xfrm>
-            <a:off x="777240" y="1874520"/>
+            <a:off x="365760" y="1228528"/>
             <a:ext cx="10241280" cy="1737360"/>
           </a:xfrm>
           <a:prstGeom prst="rect">
@@ -4303,7 +4292,7 @@
         </p:nvSpPr>
         <p:spPr>
           <a:xfrm>
-            <a:off x="9006840" y="4526280"/>
+            <a:off x="8619008" y="4594860"/>
             <a:ext cx="2468880" cy="1691640"/>
           </a:xfrm>
           <a:prstGeom prst="roundRect">
@@ -4508,6 +4497,36 @@
           </a:p>
         </p:txBody>
       </p:sp>
+      <p:pic>
+        <p:nvPicPr>
+          <p:cNvPr id="21" name="Imagen 20">
+            <a:extLst>
+              <a:ext uri="{FF2B5EF4-FFF2-40B4-BE49-F238E27FC236}">
+                <a16:creationId xmlns:a16="http://schemas.microsoft.com/office/drawing/2014/main" id="{5B2373E2-BF7E-37FE-FEB6-0F8CD7021FC2}"/>
+              </a:ext>
+            </a:extLst>
+          </p:cNvPr>
+          <p:cNvPicPr>
+            <a:picLocks noChangeAspect="1"/>
+          </p:cNvPicPr>
+          <p:nvPr/>
+        </p:nvPicPr>
+        <p:blipFill>
+          <a:blip r:embed="rId3"/>
+          <a:stretch>
+            <a:fillRect/>
+          </a:stretch>
+        </p:blipFill>
+        <p:spPr>
+          <a:xfrm>
+            <a:off x="365760" y="327697"/>
+            <a:ext cx="2124701" cy="1408471"/>
+          </a:xfrm>
+          <a:prstGeom prst="rect">
+            <a:avLst/>
+          </a:prstGeom>
+        </p:spPr>
+      </p:pic>
     </p:spTree>
   </p:cSld>
   <p:clrMapOvr>
@@ -15276,7 +15295,7 @@
                 <a:ea typeface="Cambria" pitchFamily="34" charset="-122"/>
                 <a:cs typeface="Cambria" pitchFamily="34" charset="-120"/>
               </a:rPr>
-              <a:t>293→38</a:t>
+              <a:t>293</a:t>
             </a:r>
             <a:endParaRPr lang="en-US" sz="2600" dirty="0"/>
           </a:p>

--- a/E1 - EDA/Presentacion_E1_IA.pptx
+++ b/E1 - EDA/Presentacion_E1_IA.pptx
@@ -4239,7 +4239,7 @@
                 <a:ea typeface="Calibri" pitchFamily="34" charset="-122"/>
                 <a:cs typeface="Calibri" pitchFamily="34" charset="-120"/>
               </a:rPr>
-              <a:t>Benjamin Isla Pino  </a:t>
+              <a:t>Benjamín Isla Pino  </a:t>
             </a:r>
             <a:endParaRPr lang="en-US" sz="1250" dirty="0"/>
           </a:p>
@@ -4278,7 +4278,7 @@
                 <a:ea typeface="Calibri" pitchFamily="34" charset="-122"/>
                 <a:cs typeface="Calibri" pitchFamily="34" charset="-120"/>
               </a:rPr>
-              <a:t>Sebastian Isla Pino  </a:t>
+              <a:t>Sebastián Isla Pino  </a:t>
             </a:r>
             <a:endParaRPr lang="en-US" sz="1250" dirty="0"/>
           </a:p>
@@ -10632,7 +10632,7 @@
                 <a:ea typeface="Cambria" pitchFamily="34" charset="-122"/>
                 <a:cs typeface="Cambria" pitchFamily="34" charset="-120"/>
               </a:rPr>
-              <a:t>179</a:t>
+              <a:t>134</a:t>
             </a:r>
             <a:endParaRPr lang="en-US" sz="1250" dirty="0"/>
           </a:p>
@@ -15050,7 +15050,7 @@
                 <a:ea typeface="Cambria" pitchFamily="34" charset="-122"/>
                 <a:cs typeface="Cambria" pitchFamily="34" charset="-120"/>
               </a:rPr>
-              <a:t>179</a:t>
+              <a:t>134</a:t>
             </a:r>
             <a:endParaRPr lang="en-US" sz="2600" dirty="0"/>
           </a:p>

--- a/E1 - EDA/Presentacion_E1_IA.pptx
+++ b/E1 - EDA/Presentacion_E1_IA.pptx
@@ -444,890 +444,6 @@
     <c:plotArea>
       <c:layout/>
       <c:barChart>
-        <c:barDir val="bar"/>
-        <c:grouping val="clustered"/>
-        <c:varyColors val="0"/>
-        <c:ser>
-          <c:idx val="0"/>
-          <c:order val="0"/>
-          <c:tx>
-            <c:strRef>
-              <c:f>Sheet1!$B$1</c:f>
-              <c:strCache>
-                <c:ptCount val="1"/>
-                <c:pt idx="0">
-                  <c:v>% outliers (IQR)</c:v>
-                </c:pt>
-              </c:strCache>
-            </c:strRef>
-          </c:tx>
-          <c:spPr>
-            <a:solidFill>
-              <a:srgbClr val="F2A541"/>
-            </a:solidFill>
-            <a:effectLst/>
-          </c:spPr>
-          <c:invertIfNegative val="0"/>
-          <c:dLbls>
-            <c:numFmt formatCode="0.00" sourceLinked="0"/>
-            <c:spPr>
-              <a:noFill/>
-              <a:ln>
-                <a:noFill/>
-              </a:ln>
-              <a:effectLst/>
-            </c:spPr>
-            <c:txPr>
-              <a:bodyPr/>
-              <a:lstStyle/>
-              <a:p>
-                <a:pPr>
-                  <a:defRPr sz="900" b="0" i="0" u="none" strike="noStrike">
-                    <a:solidFill>
-                      <a:srgbClr val="33415C"/>
-                    </a:solidFill>
-                    <a:latin typeface="Arial"/>
-                  </a:defRPr>
-                </a:pPr>
-                <a:endParaRPr lang="es-CL"/>
-              </a:p>
-            </c:txPr>
-            <c:showLegendKey val="0"/>
-            <c:showVal val="1"/>
-            <c:showCatName val="0"/>
-            <c:showSerName val="0"/>
-            <c:showPercent val="0"/>
-            <c:showBubbleSize val="0"/>
-            <c:showLeaderLines val="0"/>
-            <c:extLst>
-              <c:ext xmlns:c15="http://schemas.microsoft.com/office/drawing/2012/chart" uri="{CE6537A1-D6FC-4f65-9D91-7224C49458BB}">
-                <c15:showLeaderLines val="0"/>
-              </c:ext>
-            </c:extLst>
-          </c:dLbls>
-          <c:cat>
-            <c:strRef>
-              <c:f>Sheet1!$A$2:$A$9</c:f>
-              <c:strCache>
-                <c:ptCount val="8"/>
-                <c:pt idx="0">
-                  <c:v>InternetHours</c:v>
-                </c:pt>
-                <c:pt idx="1">
-                  <c:v>Age</c:v>
-                </c:pt>
-                <c:pt idx="2">
-                  <c:v>SleepHours</c:v>
-                </c:pt>
-                <c:pt idx="3">
-                  <c:v>StudyHours</c:v>
-                </c:pt>
-                <c:pt idx="4">
-                  <c:v>FinalGrade</c:v>
-                </c:pt>
-                <c:pt idx="5">
-                  <c:v>Attendance</c:v>
-                </c:pt>
-                <c:pt idx="6">
-                  <c:v>PreviousGPA</c:v>
-                </c:pt>
-                <c:pt idx="7">
-                  <c:v>AssignmentsCompleted</c:v>
-                </c:pt>
-              </c:strCache>
-            </c:strRef>
-          </c:cat>
-          <c:val>
-            <c:numRef>
-              <c:f>Sheet1!$B$2:$B$9</c:f>
-              <c:numCache>
-                <c:formatCode>General</c:formatCode>
-                <c:ptCount val="8"/>
-                <c:pt idx="0">
-                  <c:v>2.84</c:v>
-                </c:pt>
-                <c:pt idx="1">
-                  <c:v>1.24</c:v>
-                </c:pt>
-                <c:pt idx="2">
-                  <c:v>0.67</c:v>
-                </c:pt>
-                <c:pt idx="3">
-                  <c:v>0.96</c:v>
-                </c:pt>
-                <c:pt idx="4">
-                  <c:v>0.73</c:v>
-                </c:pt>
-                <c:pt idx="5">
-                  <c:v>0.53</c:v>
-                </c:pt>
-                <c:pt idx="6">
-                  <c:v>0.41</c:v>
-                </c:pt>
-                <c:pt idx="7">
-                  <c:v>0.33</c:v>
-                </c:pt>
-              </c:numCache>
-            </c:numRef>
-          </c:val>
-          <c:extLst>
-            <c:ext xmlns:c16="http://schemas.microsoft.com/office/drawing/2014/chart" uri="{C3380CC4-5D6E-409C-BE32-E72D297353CC}">
-              <c16:uniqueId val="{00000000-EA4B-456C-A9F0-52F2DB4058FD}"/>
-            </c:ext>
-          </c:extLst>
-        </c:ser>
-        <c:dLbls>
-          <c:showLegendKey val="0"/>
-          <c:showVal val="1"/>
-          <c:showCatName val="0"/>
-          <c:showSerName val="0"/>
-          <c:showPercent val="0"/>
-          <c:showBubbleSize val="0"/>
-        </c:dLbls>
-        <c:gapWidth val="150"/>
-        <c:axId val="2094734554"/>
-        <c:axId val="2094734552"/>
-      </c:barChart>
-      <c:catAx>
-        <c:axId val="2094734554"/>
-        <c:scaling>
-          <c:orientation val="minMax"/>
-        </c:scaling>
-        <c:delete val="0"/>
-        <c:axPos val="l"/>
-        <c:numFmt formatCode="General" sourceLinked="1"/>
-        <c:majorTickMark val="out"/>
-        <c:minorTickMark val="none"/>
-        <c:tickLblPos val="nextTo"/>
-        <c:spPr>
-          <a:ln w="12700" cap="flat">
-            <a:solidFill>
-              <a:srgbClr val="888888"/>
-            </a:solidFill>
-            <a:prstDash val="solid"/>
-            <a:round/>
-          </a:ln>
-        </c:spPr>
-        <c:txPr>
-          <a:bodyPr/>
-          <a:lstStyle/>
-          <a:p>
-            <a:pPr>
-              <a:defRPr sz="1000" b="0" i="0" u="none" strike="noStrike">
-                <a:solidFill>
-                  <a:srgbClr val="33415C"/>
-                </a:solidFill>
-                <a:latin typeface="Arial"/>
-              </a:defRPr>
-            </a:pPr>
-            <a:endParaRPr lang="en-US"/>
-          </a:p>
-        </c:txPr>
-        <c:crossAx val="2094734552"/>
-        <c:crosses val="autoZero"/>
-        <c:auto val="1"/>
-        <c:lblAlgn val="ctr"/>
-        <c:lblOffset val="100"/>
-        <c:noMultiLvlLbl val="1"/>
-      </c:catAx>
-      <c:valAx>
-        <c:axId val="2094734552"/>
-        <c:scaling>
-          <c:orientation val="minMax"/>
-        </c:scaling>
-        <c:delete val="0"/>
-        <c:axPos val="b"/>
-        <c:majorGridlines>
-          <c:spPr>
-            <a:ln w="12700" cap="flat">
-              <a:solidFill>
-                <a:srgbClr val="EAEEF4"/>
-              </a:solidFill>
-              <a:prstDash val="solid"/>
-              <a:round/>
-            </a:ln>
-          </c:spPr>
-        </c:majorGridlines>
-        <c:title>
-          <c:tx>
-            <c:rich>
-              <a:bodyPr/>
-              <a:lstStyle/>
-              <a:p>
-                <a:pPr>
-                  <a:defRPr b="0" i="0" u="none" strike="noStrike">
-                    <a:solidFill>
-                      <a:srgbClr val="000000"/>
-                    </a:solidFill>
-                    <a:latin typeface="Arial"/>
-                  </a:defRPr>
-                </a:pPr>
-                <a:r>
-                  <a:rPr lang="es-CL" b="0" i="0" u="none" strike="noStrike">
-                    <a:solidFill>
-                      <a:srgbClr val="000000"/>
-                    </a:solidFill>
-                    <a:latin typeface="Arial"/>
-                  </a:rPr>
-                  <a:t>% de registros</a:t>
-                </a:r>
-              </a:p>
-            </c:rich>
-          </c:tx>
-          <c:overlay val="0"/>
-        </c:title>
-        <c:numFmt formatCode="General" sourceLinked="0"/>
-        <c:majorTickMark val="out"/>
-        <c:minorTickMark val="none"/>
-        <c:tickLblPos val="low"/>
-        <c:spPr>
-          <a:ln w="12700" cap="flat">
-            <a:solidFill>
-              <a:srgbClr val="888888"/>
-            </a:solidFill>
-            <a:prstDash val="solid"/>
-            <a:round/>
-          </a:ln>
-        </c:spPr>
-        <c:txPr>
-          <a:bodyPr/>
-          <a:lstStyle/>
-          <a:p>
-            <a:pPr>
-              <a:defRPr sz="900" b="0" i="0" u="none" strike="noStrike">
-                <a:solidFill>
-                  <a:srgbClr val="33415C"/>
-                </a:solidFill>
-                <a:latin typeface="Arial"/>
-              </a:defRPr>
-            </a:pPr>
-            <a:endParaRPr lang="en-US"/>
-          </a:p>
-        </c:txPr>
-        <c:crossAx val="2094734554"/>
-        <c:crosses val="autoZero"/>
-        <c:crossBetween val="between"/>
-      </c:valAx>
-      <c:spPr>
-        <a:noFill/>
-        <a:ln>
-          <a:noFill/>
-        </a:ln>
-        <a:effectLst/>
-      </c:spPr>
-    </c:plotArea>
-    <c:plotVisOnly val="1"/>
-    <c:dispBlanksAs val="span"/>
-    <c:showDLblsOverMax val="1"/>
-  </c:chart>
-  <c:spPr>
-    <a:noFill/>
-    <a:ln>
-      <a:noFill/>
-    </a:ln>
-    <a:effectLst/>
-  </c:spPr>
-  <c:externalData r:id="rId1">
-    <c:autoUpdate val="0"/>
-  </c:externalData>
-</c:chartSpace>
-</file>
-
-<file path=ppt/charts/chart3.xml><?xml version="1.0" encoding="utf-8"?>
-<c:chartSpace xmlns:c="http://schemas.openxmlformats.org/drawingml/2006/chart" xmlns:a="http://schemas.openxmlformats.org/drawingml/2006/main" xmlns:r="http://schemas.openxmlformats.org/officeDocument/2006/relationships" xmlns:c16r2="http://schemas.microsoft.com/office/drawing/2015/06/chart">
-  <c:date1904 val="0"/>
-  <c:lang val="es-ES"/>
-  <c:roundedCorners val="1"/>
-  <c:style val="2"/>
-  <c:chart>
-    <c:autoTitleDeleted val="1"/>
-    <c:plotArea>
-      <c:layout/>
-      <c:barChart>
-        <c:barDir val="col"/>
-        <c:grouping val="clustered"/>
-        <c:varyColors val="0"/>
-        <c:ser>
-          <c:idx val="0"/>
-          <c:order val="0"/>
-          <c:tx>
-            <c:strRef>
-              <c:f>Sheet1!$B$1</c:f>
-              <c:strCache>
-                <c:ptCount val="1"/>
-                <c:pt idx="0">
-                  <c:v>N° estudiantes</c:v>
-                </c:pt>
-              </c:strCache>
-            </c:strRef>
-          </c:tx>
-          <c:spPr>
-            <a:solidFill>
-              <a:srgbClr val="1B2A4A"/>
-            </a:solidFill>
-            <a:effectLst/>
-          </c:spPr>
-          <c:invertIfNegative val="0"/>
-          <c:dLbls>
-            <c:numFmt formatCode="#,##0" sourceLinked="0"/>
-            <c:spPr>
-              <a:noFill/>
-              <a:ln>
-                <a:noFill/>
-              </a:ln>
-              <a:effectLst/>
-            </c:spPr>
-            <c:txPr>
-              <a:bodyPr/>
-              <a:lstStyle/>
-              <a:p>
-                <a:pPr>
-                  <a:defRPr sz="900" b="0" i="0" u="none" strike="noStrike">
-                    <a:solidFill>
-                      <a:srgbClr val="33415C"/>
-                    </a:solidFill>
-                    <a:latin typeface="Arial"/>
-                  </a:defRPr>
-                </a:pPr>
-                <a:endParaRPr lang="es-CL"/>
-              </a:p>
-            </c:txPr>
-            <c:showLegendKey val="0"/>
-            <c:showVal val="1"/>
-            <c:showCatName val="0"/>
-            <c:showSerName val="0"/>
-            <c:showPercent val="0"/>
-            <c:showBubbleSize val="0"/>
-            <c:showLeaderLines val="0"/>
-            <c:extLst>
-              <c:ext xmlns:c15="http://schemas.microsoft.com/office/drawing/2012/chart" uri="{CE6537A1-D6FC-4f65-9D91-7224C49458BB}">
-                <c15:showLeaderLines val="0"/>
-              </c:ext>
-            </c:extLst>
-          </c:dLbls>
-          <c:cat>
-            <c:strRef>
-              <c:f>Sheet1!$A$2:$A$10</c:f>
-              <c:strCache>
-                <c:ptCount val="9"/>
-                <c:pt idx="0">
-                  <c:v>1.0–1.8</c:v>
-                </c:pt>
-                <c:pt idx="1">
-                  <c:v>1.8–2.6</c:v>
-                </c:pt>
-                <c:pt idx="2">
-                  <c:v>2.6–3.3</c:v>
-                </c:pt>
-                <c:pt idx="3">
-                  <c:v>3.3–4.1</c:v>
-                </c:pt>
-                <c:pt idx="4">
-                  <c:v>4.1–4.9</c:v>
-                </c:pt>
-                <c:pt idx="5">
-                  <c:v>4.9–5.7</c:v>
-                </c:pt>
-                <c:pt idx="6">
-                  <c:v>5.7–6.5</c:v>
-                </c:pt>
-                <c:pt idx="7">
-                  <c:v>6.5–7.2</c:v>
-                </c:pt>
-                <c:pt idx="8">
-                  <c:v>7.2–8.0</c:v>
-                </c:pt>
-              </c:strCache>
-            </c:strRef>
-          </c:cat>
-          <c:val>
-            <c:numRef>
-              <c:f>Sheet1!$B$2:$B$10</c:f>
-              <c:numCache>
-                <c:formatCode>General</c:formatCode>
-                <c:ptCount val="9"/>
-                <c:pt idx="0">
-                  <c:v>47</c:v>
-                </c:pt>
-                <c:pt idx="1">
-                  <c:v>258</c:v>
-                </c:pt>
-                <c:pt idx="2">
-                  <c:v>681</c:v>
-                </c:pt>
-                <c:pt idx="3">
-                  <c:v>1297</c:v>
-                </c:pt>
-                <c:pt idx="4">
-                  <c:v>1501</c:v>
-                </c:pt>
-                <c:pt idx="5">
-                  <c:v>940</c:v>
-                </c:pt>
-                <c:pt idx="6">
-                  <c:v>244</c:v>
-                </c:pt>
-                <c:pt idx="7">
-                  <c:v>22</c:v>
-                </c:pt>
-                <c:pt idx="8">
-                  <c:v>6</c:v>
-                </c:pt>
-              </c:numCache>
-            </c:numRef>
-          </c:val>
-          <c:extLst>
-            <c:ext xmlns:c16="http://schemas.microsoft.com/office/drawing/2014/chart" uri="{C3380CC4-5D6E-409C-BE32-E72D297353CC}">
-              <c16:uniqueId val="{00000000-30F3-4227-8A8B-60B3ABF074AC}"/>
-            </c:ext>
-          </c:extLst>
-        </c:ser>
-        <c:dLbls>
-          <c:showLegendKey val="0"/>
-          <c:showVal val="1"/>
-          <c:showCatName val="0"/>
-          <c:showSerName val="0"/>
-          <c:showPercent val="0"/>
-          <c:showBubbleSize val="0"/>
-        </c:dLbls>
-        <c:gapWidth val="150"/>
-        <c:axId val="2094734554"/>
-        <c:axId val="2094734552"/>
-      </c:barChart>
-      <c:catAx>
-        <c:axId val="2094734554"/>
-        <c:scaling>
-          <c:orientation val="minMax"/>
-        </c:scaling>
-        <c:delete val="0"/>
-        <c:axPos val="b"/>
-        <c:numFmt formatCode="General" sourceLinked="1"/>
-        <c:majorTickMark val="out"/>
-        <c:minorTickMark val="none"/>
-        <c:tickLblPos val="low"/>
-        <c:spPr>
-          <a:ln w="12700" cap="flat">
-            <a:solidFill>
-              <a:srgbClr val="888888"/>
-            </a:solidFill>
-            <a:prstDash val="solid"/>
-            <a:round/>
-          </a:ln>
-        </c:spPr>
-        <c:txPr>
-          <a:bodyPr/>
-          <a:lstStyle/>
-          <a:p>
-            <a:pPr>
-              <a:defRPr sz="950" b="0" i="0" u="none" strike="noStrike">
-                <a:solidFill>
-                  <a:srgbClr val="33415C"/>
-                </a:solidFill>
-                <a:latin typeface="Arial"/>
-              </a:defRPr>
-            </a:pPr>
-            <a:endParaRPr lang="en-US"/>
-          </a:p>
-        </c:txPr>
-        <c:crossAx val="2094734552"/>
-        <c:crosses val="autoZero"/>
-        <c:auto val="1"/>
-        <c:lblAlgn val="ctr"/>
-        <c:lblOffset val="100"/>
-        <c:noMultiLvlLbl val="1"/>
-      </c:catAx>
-      <c:valAx>
-        <c:axId val="2094734552"/>
-        <c:scaling>
-          <c:orientation val="minMax"/>
-        </c:scaling>
-        <c:delete val="0"/>
-        <c:axPos val="l"/>
-        <c:majorGridlines>
-          <c:spPr>
-            <a:ln w="12700" cap="flat">
-              <a:solidFill>
-                <a:srgbClr val="E4E9F1"/>
-              </a:solidFill>
-              <a:prstDash val="solid"/>
-              <a:round/>
-            </a:ln>
-          </c:spPr>
-        </c:majorGridlines>
-        <c:title>
-          <c:tx>
-            <c:rich>
-              <a:bodyPr/>
-              <a:lstStyle/>
-              <a:p>
-                <a:pPr>
-                  <a:defRPr b="0" i="0" u="none" strike="noStrike">
-                    <a:solidFill>
-                      <a:srgbClr val="000000"/>
-                    </a:solidFill>
-                    <a:latin typeface="Arial"/>
-                  </a:defRPr>
-                </a:pPr>
-                <a:r>
-                  <a:rPr lang="es-CL" b="0" i="0" u="none" strike="noStrike">
-                    <a:solidFill>
-                      <a:srgbClr val="000000"/>
-                    </a:solidFill>
-                    <a:latin typeface="Arial"/>
-                  </a:rPr>
-                  <a:t>N° de estudiantes</a:t>
-                </a:r>
-              </a:p>
-            </c:rich>
-          </c:tx>
-          <c:overlay val="0"/>
-        </c:title>
-        <c:numFmt formatCode="General" sourceLinked="0"/>
-        <c:majorTickMark val="out"/>
-        <c:minorTickMark val="none"/>
-        <c:tickLblPos val="nextTo"/>
-        <c:spPr>
-          <a:ln w="12700" cap="flat">
-            <a:solidFill>
-              <a:srgbClr val="888888"/>
-            </a:solidFill>
-            <a:prstDash val="solid"/>
-            <a:round/>
-          </a:ln>
-        </c:spPr>
-        <c:txPr>
-          <a:bodyPr/>
-          <a:lstStyle/>
-          <a:p>
-            <a:pPr>
-              <a:defRPr sz="900" b="0" i="0" u="none" strike="noStrike">
-                <a:solidFill>
-                  <a:srgbClr val="33415C"/>
-                </a:solidFill>
-                <a:latin typeface="Arial"/>
-              </a:defRPr>
-            </a:pPr>
-            <a:endParaRPr lang="en-US"/>
-          </a:p>
-        </c:txPr>
-        <c:crossAx val="2094734554"/>
-        <c:crosses val="autoZero"/>
-        <c:crossBetween val="between"/>
-      </c:valAx>
-      <c:spPr>
-        <a:noFill/>
-        <a:ln>
-          <a:noFill/>
-        </a:ln>
-        <a:effectLst/>
-      </c:spPr>
-    </c:plotArea>
-    <c:plotVisOnly val="1"/>
-    <c:dispBlanksAs val="span"/>
-    <c:showDLblsOverMax val="1"/>
-  </c:chart>
-  <c:spPr>
-    <a:noFill/>
-    <a:ln>
-      <a:noFill/>
-    </a:ln>
-    <a:effectLst/>
-  </c:spPr>
-  <c:externalData r:id="rId1">
-    <c:autoUpdate val="0"/>
-  </c:externalData>
-</c:chartSpace>
-</file>
-
-<file path=ppt/charts/chart4.xml><?xml version="1.0" encoding="utf-8"?>
-<c:chartSpace xmlns:c="http://schemas.openxmlformats.org/drawingml/2006/chart" xmlns:a="http://schemas.openxmlformats.org/drawingml/2006/main" xmlns:r="http://schemas.openxmlformats.org/officeDocument/2006/relationships" xmlns:c16r2="http://schemas.microsoft.com/office/drawing/2015/06/chart">
-  <c:date1904 val="0"/>
-  <c:lang val="es-ES"/>
-  <c:roundedCorners val="1"/>
-  <c:style val="2"/>
-  <c:chart>
-    <c:autoTitleDeleted val="1"/>
-    <c:plotArea>
-      <c:layout/>
-      <c:barChart>
-        <c:barDir val="bar"/>
-        <c:grouping val="clustered"/>
-        <c:varyColors val="0"/>
-        <c:ser>
-          <c:idx val="0"/>
-          <c:order val="0"/>
-          <c:tx>
-            <c:strRef>
-              <c:f>Sheet1!$B$1</c:f>
-              <c:strCache>
-                <c:ptCount val="1"/>
-                <c:pt idx="0">
-                  <c:v>Correlación con FinalGrade</c:v>
-                </c:pt>
-              </c:strCache>
-            </c:strRef>
-          </c:tx>
-          <c:spPr>
-            <a:solidFill>
-              <a:srgbClr val="1C7293"/>
-            </a:solidFill>
-            <a:effectLst/>
-          </c:spPr>
-          <c:invertIfNegative val="0"/>
-          <c:dLbls>
-            <c:numFmt formatCode="0.00" sourceLinked="0"/>
-            <c:spPr>
-              <a:noFill/>
-              <a:ln>
-                <a:noFill/>
-              </a:ln>
-              <a:effectLst/>
-            </c:spPr>
-            <c:txPr>
-              <a:bodyPr/>
-              <a:lstStyle/>
-              <a:p>
-                <a:pPr>
-                  <a:defRPr sz="1050" b="0" i="0" u="none" strike="noStrike">
-                    <a:solidFill>
-                      <a:srgbClr val="33415C"/>
-                    </a:solidFill>
-                    <a:latin typeface="Arial"/>
-                  </a:defRPr>
-                </a:pPr>
-                <a:endParaRPr lang="es-CL"/>
-              </a:p>
-            </c:txPr>
-            <c:showLegendKey val="0"/>
-            <c:showVal val="1"/>
-            <c:showCatName val="0"/>
-            <c:showSerName val="0"/>
-            <c:showPercent val="0"/>
-            <c:showBubbleSize val="0"/>
-            <c:showLeaderLines val="0"/>
-            <c:extLst>
-              <c:ext xmlns:c15="http://schemas.microsoft.com/office/drawing/2012/chart" uri="{CE6537A1-D6FC-4f65-9D91-7224C49458BB}">
-                <c15:showLeaderLines val="0"/>
-              </c:ext>
-            </c:extLst>
-          </c:dLbls>
-          <c:cat>
-            <c:strRef>
-              <c:f>Sheet1!$A$2:$A$5</c:f>
-              <c:strCache>
-                <c:ptCount val="4"/>
-                <c:pt idx="0">
-                  <c:v>Attendance</c:v>
-                </c:pt>
-                <c:pt idx="1">
-                  <c:v>StudyHours</c:v>
-                </c:pt>
-                <c:pt idx="2">
-                  <c:v>PreviousGPA</c:v>
-                </c:pt>
-                <c:pt idx="3">
-                  <c:v>AssignmentsCompleted</c:v>
-                </c:pt>
-              </c:strCache>
-            </c:strRef>
-          </c:cat>
-          <c:val>
-            <c:numRef>
-              <c:f>Sheet1!$B$2:$B$5</c:f>
-              <c:numCache>
-                <c:formatCode>General</c:formatCode>
-                <c:ptCount val="4"/>
-                <c:pt idx="0">
-                  <c:v>0.61399999999999999</c:v>
-                </c:pt>
-                <c:pt idx="1">
-                  <c:v>0.49399999999999999</c:v>
-                </c:pt>
-                <c:pt idx="2">
-                  <c:v>0.42</c:v>
-                </c:pt>
-                <c:pt idx="3">
-                  <c:v>0.33</c:v>
-                </c:pt>
-              </c:numCache>
-            </c:numRef>
-          </c:val>
-          <c:extLst>
-            <c:ext xmlns:c16="http://schemas.microsoft.com/office/drawing/2014/chart" uri="{C3380CC4-5D6E-409C-BE32-E72D297353CC}">
-              <c16:uniqueId val="{00000000-781C-419E-B1B8-63C29A11BC3F}"/>
-            </c:ext>
-          </c:extLst>
-        </c:ser>
-        <c:dLbls>
-          <c:showLegendKey val="0"/>
-          <c:showVal val="1"/>
-          <c:showCatName val="0"/>
-          <c:showSerName val="0"/>
-          <c:showPercent val="0"/>
-          <c:showBubbleSize val="0"/>
-        </c:dLbls>
-        <c:gapWidth val="150"/>
-        <c:axId val="2094734554"/>
-        <c:axId val="2094734552"/>
-      </c:barChart>
-      <c:catAx>
-        <c:axId val="2094734554"/>
-        <c:scaling>
-          <c:orientation val="minMax"/>
-        </c:scaling>
-        <c:delete val="0"/>
-        <c:axPos val="l"/>
-        <c:numFmt formatCode="General" sourceLinked="1"/>
-        <c:majorTickMark val="out"/>
-        <c:minorTickMark val="none"/>
-        <c:tickLblPos val="nextTo"/>
-        <c:spPr>
-          <a:ln w="12700" cap="flat">
-            <a:solidFill>
-              <a:srgbClr val="888888"/>
-            </a:solidFill>
-            <a:prstDash val="solid"/>
-            <a:round/>
-          </a:ln>
-        </c:spPr>
-        <c:txPr>
-          <a:bodyPr/>
-          <a:lstStyle/>
-          <a:p>
-            <a:pPr>
-              <a:defRPr sz="1100" b="0" i="0" u="none" strike="noStrike">
-                <a:solidFill>
-                  <a:srgbClr val="33415C"/>
-                </a:solidFill>
-                <a:latin typeface="Arial"/>
-              </a:defRPr>
-            </a:pPr>
-            <a:endParaRPr lang="en-US"/>
-          </a:p>
-        </c:txPr>
-        <c:crossAx val="2094734552"/>
-        <c:crosses val="autoZero"/>
-        <c:auto val="1"/>
-        <c:lblAlgn val="ctr"/>
-        <c:lblOffset val="100"/>
-        <c:noMultiLvlLbl val="1"/>
-      </c:catAx>
-      <c:valAx>
-        <c:axId val="2094734552"/>
-        <c:scaling>
-          <c:orientation val="minMax"/>
-          <c:max val="0.7"/>
-          <c:min val="0"/>
-        </c:scaling>
-        <c:delete val="0"/>
-        <c:axPos val="b"/>
-        <c:majorGridlines>
-          <c:spPr>
-            <a:ln w="12700" cap="flat">
-              <a:solidFill>
-                <a:srgbClr val="EAEEF4"/>
-              </a:solidFill>
-              <a:prstDash val="solid"/>
-              <a:round/>
-            </a:ln>
-          </c:spPr>
-        </c:majorGridlines>
-        <c:title>
-          <c:tx>
-            <c:rich>
-              <a:bodyPr/>
-              <a:lstStyle/>
-              <a:p>
-                <a:pPr>
-                  <a:defRPr b="0" i="0" u="none" strike="noStrike">
-                    <a:solidFill>
-                      <a:srgbClr val="000000"/>
-                    </a:solidFill>
-                    <a:latin typeface="Arial"/>
-                  </a:defRPr>
-                </a:pPr>
-                <a:r>
-                  <a:rPr lang="es-CL" b="0" i="0" u="none" strike="noStrike">
-                    <a:solidFill>
-                      <a:srgbClr val="000000"/>
-                    </a:solidFill>
-                    <a:latin typeface="Arial"/>
-                  </a:rPr>
-                  <a:t>Coeficiente de Pearson (r)</a:t>
-                </a:r>
-              </a:p>
-            </c:rich>
-          </c:tx>
-          <c:overlay val="0"/>
-        </c:title>
-        <c:numFmt formatCode="General" sourceLinked="0"/>
-        <c:majorTickMark val="out"/>
-        <c:minorTickMark val="none"/>
-        <c:tickLblPos val="low"/>
-        <c:spPr>
-          <a:ln w="12700" cap="flat">
-            <a:solidFill>
-              <a:srgbClr val="888888"/>
-            </a:solidFill>
-            <a:prstDash val="solid"/>
-            <a:round/>
-          </a:ln>
-        </c:spPr>
-        <c:txPr>
-          <a:bodyPr/>
-          <a:lstStyle/>
-          <a:p>
-            <a:pPr>
-              <a:defRPr sz="900" b="0" i="0" u="none" strike="noStrike">
-                <a:solidFill>
-                  <a:srgbClr val="33415C"/>
-                </a:solidFill>
-                <a:latin typeface="Arial"/>
-              </a:defRPr>
-            </a:pPr>
-            <a:endParaRPr lang="en-US"/>
-          </a:p>
-        </c:txPr>
-        <c:crossAx val="2094734554"/>
-        <c:crosses val="autoZero"/>
-        <c:crossBetween val="between"/>
-      </c:valAx>
-      <c:spPr>
-        <a:noFill/>
-        <a:ln>
-          <a:noFill/>
-        </a:ln>
-        <a:effectLst/>
-      </c:spPr>
-    </c:plotArea>
-    <c:plotVisOnly val="1"/>
-    <c:dispBlanksAs val="span"/>
-    <c:showDLblsOverMax val="1"/>
-  </c:chart>
-  <c:spPr>
-    <a:noFill/>
-    <a:ln>
-      <a:noFill/>
-    </a:ln>
-    <a:effectLst/>
-  </c:spPr>
-  <c:externalData r:id="rId1">
-    <c:autoUpdate val="0"/>
-  </c:externalData>
-</c:chartSpace>
-</file>
-
-<file path=ppt/charts/chart5.xml><?xml version="1.0" encoding="utf-8"?>
-<c:chartSpace xmlns:c="http://schemas.openxmlformats.org/drawingml/2006/chart" xmlns:a="http://schemas.openxmlformats.org/drawingml/2006/main" xmlns:r="http://schemas.openxmlformats.org/officeDocument/2006/relationships" xmlns:c16r2="http://schemas.microsoft.com/office/drawing/2015/06/chart">
-  <c:date1904 val="0"/>
-  <c:lang val="es-ES"/>
-  <c:roundedCorners val="1"/>
-  <c:style val="2"/>
-  <c:chart>
-    <c:autoTitleDeleted val="1"/>
-    <c:plotArea>
-      <c:layout/>
-      <c:barChart>
         <c:barDir val="col"/>
         <c:grouping val="clustered"/>
         <c:varyColors val="0"/>
@@ -1546,7 +662,7 @@
 </c:chartSpace>
 </file>
 
-<file path=ppt/charts/chart6.xml><?xml version="1.0" encoding="utf-8"?>
+<file path=ppt/charts/chart3.xml><?xml version="1.0" encoding="utf-8"?>
 <c:chartSpace xmlns:c="http://schemas.openxmlformats.org/drawingml/2006/chart" xmlns:a="http://schemas.openxmlformats.org/drawingml/2006/main" xmlns:r="http://schemas.openxmlformats.org/officeDocument/2006/relationships" xmlns:c16r2="http://schemas.microsoft.com/office/drawing/2015/06/chart">
   <c:date1904 val="0"/>
   <c:lang val="es-ES"/>
@@ -1767,7 +883,7 @@
 </c:chartSpace>
 </file>
 
-<file path=ppt/charts/chart7.xml><?xml version="1.0" encoding="utf-8"?>
+<file path=ppt/charts/chart4.xml><?xml version="1.0" encoding="utf-8"?>
 <c:chartSpace xmlns:c="http://schemas.openxmlformats.org/drawingml/2006/chart" xmlns:a="http://schemas.openxmlformats.org/drawingml/2006/main" xmlns:r="http://schemas.openxmlformats.org/officeDocument/2006/relationships" xmlns:c16r2="http://schemas.microsoft.com/office/drawing/2015/06/chart">
   <c:date1904 val="0"/>
   <c:lang val="es-ES"/>
@@ -4632,7 +3748,7 @@
                 <a:ea typeface="Cambria" pitchFamily="34" charset="-122"/>
                 <a:cs typeface="Cambria" pitchFamily="34" charset="-120"/>
               </a:rPr>
-              <a:t>P1 — Beca   ·   P2 — Programa académico</a:t>
+              <a:t>P1 — Beca                                               P2 — Programa académico</a:t>
             </a:r>
             <a:endParaRPr lang="en-US" sz="3000" dirty="0"/>
           </a:p>
@@ -5240,7 +4356,29 @@
                 <a:ea typeface="Cambria" pitchFamily="34" charset="-122"/>
                 <a:cs typeface="Cambria" pitchFamily="34" charset="-120"/>
               </a:rPr>
-              <a:t>P3 — Horas de estudio   ·   P4 — Asistencia</a:t>
+              <a:t>P3 — Horas de </a:t>
+            </a:r>
+            <a:r>
+              <a:rPr lang="en-US" sz="3000" b="1" dirty="0" err="1">
+                <a:solidFill>
+                  <a:srgbClr val="1B2A4A"/>
+                </a:solidFill>
+                <a:latin typeface="Cambria" pitchFamily="34" charset="0"/>
+                <a:ea typeface="Cambria" pitchFamily="34" charset="-122"/>
+                <a:cs typeface="Cambria" pitchFamily="34" charset="-120"/>
+              </a:rPr>
+              <a:t>estudio</a:t>
+            </a:r>
+            <a:r>
+              <a:rPr lang="en-US" sz="3000" b="1" dirty="0">
+                <a:solidFill>
+                  <a:srgbClr val="1B2A4A"/>
+                </a:solidFill>
+                <a:latin typeface="Cambria" pitchFamily="34" charset="0"/>
+                <a:ea typeface="Cambria" pitchFamily="34" charset="-122"/>
+                <a:cs typeface="Cambria" pitchFamily="34" charset="-120"/>
+              </a:rPr>
+              <a:t>                     P4 — Asistencia</a:t>
             </a:r>
             <a:endParaRPr lang="en-US" sz="3000" dirty="0"/>
           </a:p>
@@ -17368,22 +16506,6 @@
           </a:p>
         </p:txBody>
       </p:sp>
-      <p:graphicFrame>
-        <p:nvGraphicFramePr>
-          <p:cNvPr id="4" name="Chart 0"/>
-          <p:cNvGraphicFramePr/>
-          <p:nvPr/>
-        </p:nvGraphicFramePr>
-        <p:xfrm>
-          <a:off x="548640" y="1417320"/>
-          <a:ext cx="6675120" cy="4160520"/>
-        </p:xfrm>
-        <a:graphic>
-          <a:graphicData uri="http://schemas.openxmlformats.org/drawingml/2006/chart">
-            <c:chart xmlns:c="http://schemas.openxmlformats.org/drawingml/2006/chart" xmlns:r="http://schemas.openxmlformats.org/officeDocument/2006/relationships" r:id="rId3"/>
-          </a:graphicData>
-        </a:graphic>
-      </p:graphicFrame>
       <p:sp>
         <p:nvSpPr>
           <p:cNvPr id="5" name="Shape 2"/>
@@ -17392,7 +16514,7 @@
         </p:nvSpPr>
         <p:spPr>
           <a:xfrm>
-            <a:off x="7406640" y="1417320"/>
+            <a:off x="7788622" y="1348740"/>
             <a:ext cx="4206240" cy="4160520"/>
           </a:xfrm>
           <a:prstGeom prst="roundRect">
@@ -17421,7 +16543,7 @@
         </p:nvSpPr>
         <p:spPr>
           <a:xfrm>
-            <a:off x="7680960" y="1627632"/>
+            <a:off x="7982712" y="1545336"/>
             <a:ext cx="3657600" cy="320040"/>
           </a:xfrm>
           <a:prstGeom prst="rect">
@@ -17460,7 +16582,7 @@
         </p:nvSpPr>
         <p:spPr>
           <a:xfrm>
-            <a:off x="7680960" y="2057400"/>
+            <a:off x="7982712" y="1735074"/>
             <a:ext cx="3657600" cy="960120"/>
           </a:xfrm>
           <a:prstGeom prst="rect">
@@ -17513,7 +16635,7 @@
         </p:nvSpPr>
         <p:spPr>
           <a:xfrm>
-            <a:off x="7680960" y="3108960"/>
+            <a:off x="7982712" y="2528316"/>
             <a:ext cx="3657600" cy="960120"/>
           </a:xfrm>
           <a:prstGeom prst="rect">
@@ -17566,7 +16688,7 @@
         </p:nvSpPr>
         <p:spPr>
           <a:xfrm>
-            <a:off x="7680960" y="4160520"/>
+            <a:off x="7982712" y="3409696"/>
             <a:ext cx="3657600" cy="960120"/>
           </a:xfrm>
           <a:prstGeom prst="rect">
@@ -17689,6 +16811,36 @@
           </a:p>
         </p:txBody>
       </p:sp>
+      <p:pic>
+        <p:nvPicPr>
+          <p:cNvPr id="13" name="Imagen 12">
+            <a:extLst>
+              <a:ext uri="{FF2B5EF4-FFF2-40B4-BE49-F238E27FC236}">
+                <a16:creationId xmlns:a16="http://schemas.microsoft.com/office/drawing/2014/main" id="{2C8B62B0-6B7D-79B0-8B50-1DF5DB9717AC}"/>
+              </a:ext>
+            </a:extLst>
+          </p:cNvPr>
+          <p:cNvPicPr>
+            <a:picLocks noChangeAspect="1"/>
+          </p:cNvPicPr>
+          <p:nvPr/>
+        </p:nvPicPr>
+        <p:blipFill>
+          <a:blip r:embed="rId3"/>
+          <a:stretch>
+            <a:fillRect/>
+          </a:stretch>
+        </p:blipFill>
+        <p:spPr>
+          <a:xfrm>
+            <a:off x="88150" y="1795272"/>
+            <a:ext cx="7819625" cy="3585456"/>
+          </a:xfrm>
+          <a:prstGeom prst="rect">
+            <a:avLst/>
+          </a:prstGeom>
+        </p:spPr>
+      </p:pic>
     </p:spTree>
   </p:cSld>
   <p:clrMapOvr>
@@ -17800,22 +16952,6 @@
           </a:p>
         </p:txBody>
       </p:sp>
-      <p:graphicFrame>
-        <p:nvGraphicFramePr>
-          <p:cNvPr id="4" name="Chart 0"/>
-          <p:cNvGraphicFramePr/>
-          <p:nvPr/>
-        </p:nvGraphicFramePr>
-        <p:xfrm>
-          <a:off x="548640" y="1417320"/>
-          <a:ext cx="7315200" cy="4297680"/>
-        </p:xfrm>
-        <a:graphic>
-          <a:graphicData uri="http://schemas.openxmlformats.org/drawingml/2006/chart">
-            <c:chart xmlns:c="http://schemas.openxmlformats.org/drawingml/2006/chart" xmlns:r="http://schemas.openxmlformats.org/officeDocument/2006/relationships" r:id="rId3"/>
-          </a:graphicData>
-        </a:graphic>
-      </p:graphicFrame>
       <p:sp>
         <p:nvSpPr>
           <p:cNvPr id="5" name="Shape 2"/>
@@ -18077,6 +17213,36 @@
           </a:p>
         </p:txBody>
       </p:sp>
+      <p:pic>
+        <p:nvPicPr>
+          <p:cNvPr id="13" name="Imagen 12">
+            <a:extLst>
+              <a:ext uri="{FF2B5EF4-FFF2-40B4-BE49-F238E27FC236}">
+                <a16:creationId xmlns:a16="http://schemas.microsoft.com/office/drawing/2014/main" id="{C935E663-4E95-CB05-1078-B19DD2A22986}"/>
+              </a:ext>
+            </a:extLst>
+          </p:cNvPr>
+          <p:cNvPicPr>
+            <a:picLocks noChangeAspect="1"/>
+          </p:cNvPicPr>
+          <p:nvPr/>
+        </p:nvPicPr>
+        <p:blipFill>
+          <a:blip r:embed="rId3"/>
+          <a:stretch>
+            <a:fillRect/>
+          </a:stretch>
+        </p:blipFill>
+        <p:spPr>
+          <a:xfrm>
+            <a:off x="157795" y="2068881"/>
+            <a:ext cx="7911785" cy="3451757"/>
+          </a:xfrm>
+          <a:prstGeom prst="rect">
+            <a:avLst/>
+          </a:prstGeom>
+        </p:spPr>
+      </p:pic>
     </p:spTree>
   </p:cSld>
   <p:clrMapOvr>
@@ -18188,22 +17354,6 @@
           </a:p>
         </p:txBody>
       </p:sp>
-      <p:graphicFrame>
-        <p:nvGraphicFramePr>
-          <p:cNvPr id="4" name="Chart 0"/>
-          <p:cNvGraphicFramePr/>
-          <p:nvPr/>
-        </p:nvGraphicFramePr>
-        <p:xfrm>
-          <a:off x="548640" y="1463040"/>
-          <a:ext cx="6858000" cy="4206240"/>
-        </p:xfrm>
-        <a:graphic>
-          <a:graphicData uri="http://schemas.openxmlformats.org/drawingml/2006/chart">
-            <c:chart xmlns:c="http://schemas.openxmlformats.org/drawingml/2006/chart" xmlns:r="http://schemas.openxmlformats.org/officeDocument/2006/relationships" r:id="rId3"/>
-          </a:graphicData>
-        </a:graphic>
-      </p:graphicFrame>
       <p:sp>
         <p:nvSpPr>
           <p:cNvPr id="5" name="Shape 2"/>
@@ -18211,9 +17361,9 @@
           <p:nvPr/>
         </p:nvSpPr>
         <p:spPr>
-          <a:xfrm>
-            <a:off x="7635240" y="1463040"/>
-            <a:ext cx="3977640" cy="4206240"/>
+          <a:xfrm rot="16200000">
+            <a:off x="4787606" y="1432516"/>
+            <a:ext cx="1430608" cy="8288020"/>
           </a:xfrm>
           <a:prstGeom prst="roundRect">
             <a:avLst>
@@ -18283,8 +17433,8 @@
         </p:nvSpPr>
         <p:spPr>
           <a:xfrm>
-            <a:off x="7909560" y="2286000"/>
-            <a:ext cx="3520440" cy="3200400"/>
+            <a:off x="1424941" y="4753616"/>
+            <a:ext cx="3764280" cy="1442720"/>
           </a:xfrm>
           <a:prstGeom prst="rect">
             <a:avLst/>
@@ -18304,6 +17454,17 @@
               <a:buChar char="▪"/>
             </a:pPr>
             <a:r>
+              <a:rPr lang="en-US" sz="1150" dirty="0" err="1">
+                <a:solidFill>
+                  <a:srgbClr val="33415C"/>
+                </a:solidFill>
+                <a:latin typeface="Calibri" pitchFamily="34" charset="0"/>
+                <a:ea typeface="Calibri" pitchFamily="34" charset="-122"/>
+                <a:cs typeface="Calibri" pitchFamily="34" charset="-120"/>
+              </a:rPr>
+              <a:t>PreviousGPA</a:t>
+            </a:r>
+            <a:r>
               <a:rPr lang="en-US" sz="1150" dirty="0">
                 <a:solidFill>
                   <a:srgbClr val="33415C"/>
@@ -18312,7 +17473,161 @@
                 <a:ea typeface="Calibri" pitchFamily="34" charset="-122"/>
                 <a:cs typeface="Calibri" pitchFamily="34" charset="-120"/>
               </a:rPr>
-              <a:t>Attendance y StudyHours muestran la asociación positiva más fuerte con FinalGrade.</a:t>
+              <a:t> y </a:t>
+            </a:r>
+            <a:r>
+              <a:rPr lang="en-US" sz="1150" dirty="0" err="1">
+                <a:solidFill>
+                  <a:srgbClr val="33415C"/>
+                </a:solidFill>
+                <a:latin typeface="Calibri" pitchFamily="34" charset="0"/>
+                <a:ea typeface="Calibri" pitchFamily="34" charset="-122"/>
+                <a:cs typeface="Calibri" pitchFamily="34" charset="-120"/>
+              </a:rPr>
+              <a:t>AssignmentsComplete</a:t>
+            </a:r>
+            <a:r>
+              <a:rPr lang="en-US" sz="1150" dirty="0">
+                <a:solidFill>
+                  <a:srgbClr val="33415C"/>
+                </a:solidFill>
+                <a:latin typeface="Calibri" pitchFamily="34" charset="0"/>
+                <a:ea typeface="Calibri" pitchFamily="34" charset="-122"/>
+                <a:cs typeface="Calibri" pitchFamily="34" charset="-120"/>
+              </a:rPr>
+              <a:t> </a:t>
+            </a:r>
+            <a:r>
+              <a:rPr lang="en-US" sz="1150" dirty="0" err="1">
+                <a:solidFill>
+                  <a:srgbClr val="33415C"/>
+                </a:solidFill>
+                <a:latin typeface="Calibri" pitchFamily="34" charset="0"/>
+                <a:ea typeface="Calibri" pitchFamily="34" charset="-122"/>
+                <a:cs typeface="Calibri" pitchFamily="34" charset="-120"/>
+              </a:rPr>
+              <a:t>dmuestran</a:t>
+            </a:r>
+            <a:r>
+              <a:rPr lang="en-US" sz="1150" dirty="0">
+                <a:solidFill>
+                  <a:srgbClr val="33415C"/>
+                </a:solidFill>
+                <a:latin typeface="Calibri" pitchFamily="34" charset="0"/>
+                <a:ea typeface="Calibri" pitchFamily="34" charset="-122"/>
+                <a:cs typeface="Calibri" pitchFamily="34" charset="-120"/>
+              </a:rPr>
+              <a:t> la </a:t>
+            </a:r>
+            <a:r>
+              <a:rPr lang="en-US" sz="1150" dirty="0" err="1">
+                <a:solidFill>
+                  <a:srgbClr val="33415C"/>
+                </a:solidFill>
+                <a:latin typeface="Calibri" pitchFamily="34" charset="0"/>
+                <a:ea typeface="Calibri" pitchFamily="34" charset="-122"/>
+                <a:cs typeface="Calibri" pitchFamily="34" charset="-120"/>
+              </a:rPr>
+              <a:t>asociación</a:t>
+            </a:r>
+            <a:r>
+              <a:rPr lang="en-US" sz="1150" dirty="0">
+                <a:solidFill>
+                  <a:srgbClr val="33415C"/>
+                </a:solidFill>
+                <a:latin typeface="Calibri" pitchFamily="34" charset="0"/>
+                <a:ea typeface="Calibri" pitchFamily="34" charset="-122"/>
+                <a:cs typeface="Calibri" pitchFamily="34" charset="-120"/>
+              </a:rPr>
+              <a:t> </a:t>
+            </a:r>
+            <a:r>
+              <a:rPr lang="en-US" sz="1150" dirty="0" err="1">
+                <a:solidFill>
+                  <a:srgbClr val="33415C"/>
+                </a:solidFill>
+                <a:latin typeface="Calibri" pitchFamily="34" charset="0"/>
+                <a:ea typeface="Calibri" pitchFamily="34" charset="-122"/>
+                <a:cs typeface="Calibri" pitchFamily="34" charset="-120"/>
+              </a:rPr>
+              <a:t>positiva</a:t>
+            </a:r>
+            <a:r>
+              <a:rPr lang="en-US" sz="1150" dirty="0">
+                <a:solidFill>
+                  <a:srgbClr val="33415C"/>
+                </a:solidFill>
+                <a:latin typeface="Calibri" pitchFamily="34" charset="0"/>
+                <a:ea typeface="Calibri" pitchFamily="34" charset="-122"/>
+                <a:cs typeface="Calibri" pitchFamily="34" charset="-120"/>
+              </a:rPr>
+              <a:t> </a:t>
+            </a:r>
+            <a:r>
+              <a:rPr lang="en-US" sz="1150" dirty="0" err="1">
+                <a:solidFill>
+                  <a:srgbClr val="33415C"/>
+                </a:solidFill>
+                <a:latin typeface="Calibri" pitchFamily="34" charset="0"/>
+                <a:ea typeface="Calibri" pitchFamily="34" charset="-122"/>
+                <a:cs typeface="Calibri" pitchFamily="34" charset="-120"/>
+              </a:rPr>
+              <a:t>más</a:t>
+            </a:r>
+            <a:r>
+              <a:rPr lang="en-US" sz="1150" dirty="0">
+                <a:solidFill>
+                  <a:srgbClr val="33415C"/>
+                </a:solidFill>
+                <a:latin typeface="Calibri" pitchFamily="34" charset="0"/>
+                <a:ea typeface="Calibri" pitchFamily="34" charset="-122"/>
+                <a:cs typeface="Calibri" pitchFamily="34" charset="-120"/>
+              </a:rPr>
+              <a:t> </a:t>
+            </a:r>
+            <a:r>
+              <a:rPr lang="en-US" sz="1150" dirty="0" err="1">
+                <a:solidFill>
+                  <a:srgbClr val="33415C"/>
+                </a:solidFill>
+                <a:latin typeface="Calibri" pitchFamily="34" charset="0"/>
+                <a:ea typeface="Calibri" pitchFamily="34" charset="-122"/>
+                <a:cs typeface="Calibri" pitchFamily="34" charset="-120"/>
+              </a:rPr>
+              <a:t>fuerte</a:t>
+            </a:r>
+            <a:r>
+              <a:rPr lang="en-US" sz="1150" dirty="0">
+                <a:solidFill>
+                  <a:srgbClr val="33415C"/>
+                </a:solidFill>
+                <a:latin typeface="Calibri" pitchFamily="34" charset="0"/>
+                <a:ea typeface="Calibri" pitchFamily="34" charset="-122"/>
+                <a:cs typeface="Calibri" pitchFamily="34" charset="-120"/>
+              </a:rPr>
+              <a:t> con </a:t>
+            </a:r>
+            <a:r>
+              <a:rPr lang="en-US" sz="1150" dirty="0" err="1">
+                <a:solidFill>
+                  <a:srgbClr val="33415C"/>
+                </a:solidFill>
+                <a:latin typeface="Calibri" pitchFamily="34" charset="0"/>
+                <a:ea typeface="Calibri" pitchFamily="34" charset="-122"/>
+                <a:cs typeface="Calibri" pitchFamily="34" charset="-120"/>
+              </a:rPr>
+              <a:t>FinalGrade</a:t>
+            </a:r>
+            <a:r>
+              <a:rPr lang="en-US" sz="1150" dirty="0">
+                <a:solidFill>
+                  <a:srgbClr val="33415C"/>
+                </a:solidFill>
+                <a:latin typeface="Calibri" pitchFamily="34" charset="0"/>
+                <a:ea typeface="Calibri" pitchFamily="34" charset="-122"/>
+                <a:cs typeface="Calibri" pitchFamily="34" charset="-120"/>
+              </a:rPr>
+              <a:t>.</a:t>
             </a:r>
             <a:endParaRPr lang="en-US" sz="1150" dirty="0"/>
           </a:p>
@@ -18333,10 +17648,243 @@
                 <a:ea typeface="Calibri" pitchFamily="34" charset="-122"/>
                 <a:cs typeface="Calibri" pitchFamily="34" charset="-120"/>
               </a:rPr>
-              <a:t>PreviousGPA y AssignmentsCompleted también se asocian positivamente.</a:t>
+              <a:t>Attendance y </a:t>
+            </a:r>
+            <a:r>
+              <a:rPr lang="en-US" sz="1150" dirty="0" err="1">
+                <a:solidFill>
+                  <a:srgbClr val="33415C"/>
+                </a:solidFill>
+                <a:latin typeface="Calibri" pitchFamily="34" charset="0"/>
+                <a:ea typeface="Calibri" pitchFamily="34" charset="-122"/>
+                <a:cs typeface="Calibri" pitchFamily="34" charset="-120"/>
+              </a:rPr>
+              <a:t>StudyHours</a:t>
+            </a:r>
+            <a:r>
+              <a:rPr lang="en-US" sz="1150" dirty="0">
+                <a:solidFill>
+                  <a:srgbClr val="33415C"/>
+                </a:solidFill>
+                <a:latin typeface="Calibri" pitchFamily="34" charset="0"/>
+                <a:ea typeface="Calibri" pitchFamily="34" charset="-122"/>
+                <a:cs typeface="Calibri" pitchFamily="34" charset="-120"/>
+              </a:rPr>
+              <a:t> Tambien se </a:t>
+            </a:r>
+            <a:r>
+              <a:rPr lang="en-US" sz="1150" dirty="0" err="1">
+                <a:solidFill>
+                  <a:srgbClr val="33415C"/>
+                </a:solidFill>
+                <a:latin typeface="Calibri" pitchFamily="34" charset="0"/>
+                <a:ea typeface="Calibri" pitchFamily="34" charset="-122"/>
+                <a:cs typeface="Calibri" pitchFamily="34" charset="-120"/>
+              </a:rPr>
+              <a:t>asocian</a:t>
+            </a:r>
+            <a:r>
+              <a:rPr lang="en-US" sz="1150" dirty="0">
+                <a:solidFill>
+                  <a:srgbClr val="33415C"/>
+                </a:solidFill>
+                <a:latin typeface="Calibri" pitchFamily="34" charset="0"/>
+                <a:ea typeface="Calibri" pitchFamily="34" charset="-122"/>
+                <a:cs typeface="Calibri" pitchFamily="34" charset="-120"/>
+              </a:rPr>
+              <a:t> </a:t>
+            </a:r>
+            <a:r>
+              <a:rPr lang="en-US" sz="1150" dirty="0" err="1">
+                <a:solidFill>
+                  <a:srgbClr val="33415C"/>
+                </a:solidFill>
+                <a:latin typeface="Calibri" pitchFamily="34" charset="0"/>
+                <a:ea typeface="Calibri" pitchFamily="34" charset="-122"/>
+                <a:cs typeface="Calibri" pitchFamily="34" charset="-120"/>
+              </a:rPr>
+              <a:t>positivamente</a:t>
+            </a:r>
+            <a:r>
+              <a:rPr lang="en-US" sz="1150" dirty="0">
+                <a:solidFill>
+                  <a:srgbClr val="33415C"/>
+                </a:solidFill>
+                <a:latin typeface="Calibri" pitchFamily="34" charset="0"/>
+                <a:ea typeface="Calibri" pitchFamily="34" charset="-122"/>
+                <a:cs typeface="Calibri" pitchFamily="34" charset="-120"/>
+              </a:rPr>
+              <a:t>.</a:t>
             </a:r>
             <a:endParaRPr lang="en-US" sz="1150" dirty="0"/>
           </a:p>
+        </p:txBody>
+      </p:sp>
+      <p:sp>
+        <p:nvSpPr>
+          <p:cNvPr id="8" name="Text 5"/>
+          <p:cNvSpPr/>
+          <p:nvPr/>
+        </p:nvSpPr>
+        <p:spPr>
+          <a:xfrm>
+            <a:off x="548640" y="6400800"/>
+            <a:ext cx="5486400" cy="320040"/>
+          </a:xfrm>
+          <a:prstGeom prst="rect">
+            <a:avLst/>
+          </a:prstGeom>
+          <a:noFill/>
+          <a:ln/>
+        </p:spPr>
+        <p:txBody>
+          <a:bodyPr wrap="square" rtlCol="0" anchor="ctr"/>
+          <a:lstStyle/>
+          <a:p>
+            <a:pPr marL="0" indent="0" algn="l">
+              <a:buNone/>
+            </a:pPr>
+            <a:r>
+              <a:rPr lang="en-US" sz="900" dirty="0">
+                <a:solidFill>
+                  <a:srgbClr val="9AA7BD"/>
+                </a:solidFill>
+                <a:latin typeface="Calibri" pitchFamily="34" charset="0"/>
+                <a:ea typeface="Calibri" pitchFamily="34" charset="-122"/>
+                <a:cs typeface="Calibri" pitchFamily="34" charset="-120"/>
+              </a:rPr>
+              <a:t>Rendimiento Académico · Evaluación 1</a:t>
+            </a:r>
+            <a:endParaRPr lang="en-US" sz="900" dirty="0"/>
+          </a:p>
+        </p:txBody>
+      </p:sp>
+      <p:sp>
+        <p:nvSpPr>
+          <p:cNvPr id="9" name="Text 6"/>
+          <p:cNvSpPr/>
+          <p:nvPr/>
+        </p:nvSpPr>
+        <p:spPr>
+          <a:xfrm>
+            <a:off x="11365992" y="6400800"/>
+            <a:ext cx="548640" cy="320040"/>
+          </a:xfrm>
+          <a:prstGeom prst="rect">
+            <a:avLst/>
+          </a:prstGeom>
+          <a:noFill/>
+          <a:ln/>
+        </p:spPr>
+        <p:txBody>
+          <a:bodyPr wrap="square" rtlCol="0" anchor="ctr"/>
+          <a:lstStyle/>
+          <a:p>
+            <a:pPr marL="0" indent="0" algn="r">
+              <a:buNone/>
+            </a:pPr>
+            <a:r>
+              <a:rPr lang="en-US" sz="1000" dirty="0">
+                <a:solidFill>
+                  <a:srgbClr val="5B6B84"/>
+                </a:solidFill>
+                <a:latin typeface="Calibri" pitchFamily="34" charset="0"/>
+                <a:ea typeface="Calibri" pitchFamily="34" charset="-122"/>
+                <a:cs typeface="Calibri" pitchFamily="34" charset="-120"/>
+              </a:rPr>
+              <a:t>09</a:t>
+            </a:r>
+            <a:endParaRPr lang="en-US" sz="1000" dirty="0"/>
+          </a:p>
+        </p:txBody>
+      </p:sp>
+      <p:pic>
+        <p:nvPicPr>
+          <p:cNvPr id="11" name="Imagen 10">
+            <a:extLst>
+              <a:ext uri="{FF2B5EF4-FFF2-40B4-BE49-F238E27FC236}">
+                <a16:creationId xmlns:a16="http://schemas.microsoft.com/office/drawing/2014/main" id="{D048716A-3F61-B596-CCC9-31CE15485FCD}"/>
+              </a:ext>
+            </a:extLst>
+          </p:cNvPr>
+          <p:cNvPicPr>
+            <a:picLocks noChangeAspect="1"/>
+          </p:cNvPicPr>
+          <p:nvPr/>
+        </p:nvPicPr>
+        <p:blipFill>
+          <a:blip r:embed="rId3"/>
+          <a:stretch>
+            <a:fillRect/>
+          </a:stretch>
+        </p:blipFill>
+        <p:spPr>
+          <a:xfrm>
+            <a:off x="525185" y="1439591"/>
+            <a:ext cx="5013284" cy="3272021"/>
+          </a:xfrm>
+          <a:prstGeom prst="rect">
+            <a:avLst/>
+          </a:prstGeom>
+        </p:spPr>
+      </p:pic>
+      <p:pic>
+        <p:nvPicPr>
+          <p:cNvPr id="13" name="Imagen 12">
+            <a:extLst>
+              <a:ext uri="{FF2B5EF4-FFF2-40B4-BE49-F238E27FC236}">
+                <a16:creationId xmlns:a16="http://schemas.microsoft.com/office/drawing/2014/main" id="{6DE2CA7B-18E6-66B7-216D-51E55D97BEBE}"/>
+              </a:ext>
+            </a:extLst>
+          </p:cNvPr>
+          <p:cNvPicPr>
+            <a:picLocks noChangeAspect="1"/>
+          </p:cNvPicPr>
+          <p:nvPr/>
+        </p:nvPicPr>
+        <p:blipFill>
+          <a:blip r:embed="rId4"/>
+          <a:stretch>
+            <a:fillRect/>
+          </a:stretch>
+        </p:blipFill>
+        <p:spPr>
+          <a:xfrm>
+            <a:off x="5898530" y="1371599"/>
+            <a:ext cx="6080616" cy="2656759"/>
+          </a:xfrm>
+          <a:prstGeom prst="rect">
+            <a:avLst/>
+          </a:prstGeom>
+        </p:spPr>
+      </p:pic>
+      <p:sp>
+        <p:nvSpPr>
+          <p:cNvPr id="14" name="CuadroTexto 13">
+            <a:extLst>
+              <a:ext uri="{FF2B5EF4-FFF2-40B4-BE49-F238E27FC236}">
+                <a16:creationId xmlns:a16="http://schemas.microsoft.com/office/drawing/2014/main" id="{0B31E3F0-986D-9842-0512-32377ADDDA65}"/>
+              </a:ext>
+            </a:extLst>
+          </p:cNvPr>
+          <p:cNvSpPr txBox="1"/>
+          <p:nvPr/>
+        </p:nvSpPr>
+        <p:spPr>
+          <a:xfrm>
+            <a:off x="5107941" y="4990098"/>
+            <a:ext cx="4845118" cy="1415772"/>
+          </a:xfrm>
+          <a:prstGeom prst="rect">
+            <a:avLst/>
+          </a:prstGeom>
+          <a:noFill/>
+        </p:spPr>
+        <p:txBody>
+          <a:bodyPr wrap="square" rtlCol="0">
+            <a:spAutoFit/>
+          </a:bodyPr>
+          <a:lstStyle/>
           <a:p>
             <a:pPr marL="342900" indent="-342900">
               <a:spcAft>
@@ -18346,7 +17894,7 @@
               <a:buChar char="▪"/>
             </a:pPr>
             <a:r>
-              <a:rPr lang="en-US" sz="1150" dirty="0">
+              <a:rPr lang="en-US" sz="1200" dirty="0" err="1">
                 <a:solidFill>
                   <a:srgbClr val="33415C"/>
                 </a:solidFill>
@@ -18354,9 +17902,86 @@
                 <a:ea typeface="Calibri" pitchFamily="34" charset="-122"/>
                 <a:cs typeface="Calibri" pitchFamily="34" charset="-120"/>
               </a:rPr>
-              <a:t>InternetHours es la excepción: relación negativa débil (r ≈ -0,18).</a:t>
-            </a:r>
-            <a:endParaRPr lang="en-US" sz="1150" dirty="0"/>
+              <a:t>InternetHours</a:t>
+            </a:r>
+            <a:r>
+              <a:rPr lang="en-US" sz="1200" dirty="0">
+                <a:solidFill>
+                  <a:srgbClr val="33415C"/>
+                </a:solidFill>
+                <a:latin typeface="Calibri" pitchFamily="34" charset="0"/>
+                <a:ea typeface="Calibri" pitchFamily="34" charset="-122"/>
+                <a:cs typeface="Calibri" pitchFamily="34" charset="-120"/>
+              </a:rPr>
+              <a:t> y age son las variables con </a:t>
+            </a:r>
+            <a:r>
+              <a:rPr lang="en-US" sz="1200" dirty="0" err="1">
+                <a:solidFill>
+                  <a:srgbClr val="33415C"/>
+                </a:solidFill>
+                <a:latin typeface="Calibri" pitchFamily="34" charset="0"/>
+                <a:ea typeface="Calibri" pitchFamily="34" charset="-122"/>
+                <a:cs typeface="Calibri" pitchFamily="34" charset="-120"/>
+              </a:rPr>
+              <a:t>menor</a:t>
+            </a:r>
+            <a:r>
+              <a:rPr lang="en-US" sz="1200" dirty="0">
+                <a:solidFill>
+                  <a:srgbClr val="33415C"/>
+                </a:solidFill>
+                <a:latin typeface="Calibri" pitchFamily="34" charset="0"/>
+                <a:ea typeface="Calibri" pitchFamily="34" charset="-122"/>
+                <a:cs typeface="Calibri" pitchFamily="34" charset="-120"/>
+              </a:rPr>
+              <a:t> </a:t>
+            </a:r>
+            <a:r>
+              <a:rPr lang="en-US" sz="1200" dirty="0" err="1">
+                <a:solidFill>
+                  <a:srgbClr val="33415C"/>
+                </a:solidFill>
+                <a:latin typeface="Calibri" pitchFamily="34" charset="0"/>
+                <a:ea typeface="Calibri" pitchFamily="34" charset="-122"/>
+                <a:cs typeface="Calibri" pitchFamily="34" charset="-120"/>
+              </a:rPr>
+              <a:t>relación</a:t>
+            </a:r>
+            <a:r>
+              <a:rPr lang="en-US" sz="1200" dirty="0">
+                <a:solidFill>
+                  <a:srgbClr val="33415C"/>
+                </a:solidFill>
+                <a:latin typeface="Calibri" pitchFamily="34" charset="0"/>
+                <a:ea typeface="Calibri" pitchFamily="34" charset="-122"/>
+                <a:cs typeface="Calibri" pitchFamily="34" charset="-120"/>
+              </a:rPr>
+              <a:t> con </a:t>
+            </a:r>
+            <a:r>
+              <a:rPr lang="en-US" sz="1200" dirty="0" err="1">
+                <a:solidFill>
+                  <a:srgbClr val="33415C"/>
+                </a:solidFill>
+                <a:latin typeface="Calibri" pitchFamily="34" charset="0"/>
+                <a:ea typeface="Calibri" pitchFamily="34" charset="-122"/>
+                <a:cs typeface="Calibri" pitchFamily="34" charset="-120"/>
+              </a:rPr>
+              <a:t>FinalGrade</a:t>
+            </a:r>
+            <a:r>
+              <a:rPr lang="en-US" sz="1200" dirty="0">
+                <a:solidFill>
+                  <a:srgbClr val="33415C"/>
+                </a:solidFill>
+                <a:latin typeface="Calibri" pitchFamily="34" charset="0"/>
+                <a:ea typeface="Calibri" pitchFamily="34" charset="-122"/>
+                <a:cs typeface="Calibri" pitchFamily="34" charset="-120"/>
+              </a:rPr>
+              <a:t> (r ≈ 0).</a:t>
+            </a:r>
+            <a:endParaRPr lang="en-US" sz="1200" dirty="0"/>
           </a:p>
           <a:p>
             <a:pPr marL="342900" indent="-342900">
@@ -18367,7 +17992,7 @@
               <a:buChar char="▪"/>
             </a:pPr>
             <a:r>
-              <a:rPr lang="en-US" sz="1150" dirty="0">
+              <a:rPr lang="en-US" sz="1200" dirty="0">
                 <a:solidFill>
                   <a:srgbClr val="33415C"/>
                 </a:solidFill>
@@ -18375,87 +18000,166 @@
                 <a:ea typeface="Calibri" pitchFamily="34" charset="-122"/>
                 <a:cs typeface="Calibri" pitchFamily="34" charset="-120"/>
               </a:rPr>
-              <a:t>Los gráficos de dispersión confirman una tendencia positiva y razonablemente lineal.</a:t>
-            </a:r>
-            <a:endParaRPr lang="en-US" sz="1150" dirty="0"/>
-          </a:p>
-        </p:txBody>
-      </p:sp>
-      <p:sp>
-        <p:nvSpPr>
-          <p:cNvPr id="8" name="Text 5"/>
-          <p:cNvSpPr/>
-          <p:nvPr/>
-        </p:nvSpPr>
-        <p:spPr>
-          <a:xfrm>
-            <a:off x="548640" y="6400800"/>
-            <a:ext cx="5486400" cy="320040"/>
-          </a:xfrm>
-          <a:prstGeom prst="rect">
-            <a:avLst/>
-          </a:prstGeom>
-          <a:noFill/>
-          <a:ln/>
-        </p:spPr>
-        <p:txBody>
-          <a:bodyPr wrap="square" rtlCol="0" anchor="ctr"/>
-          <a:lstStyle/>
-          <a:p>
-            <a:pPr marL="0" indent="0" algn="l">
-              <a:buNone/>
-            </a:pPr>
-            <a:r>
-              <a:rPr lang="en-US" sz="900" dirty="0">
-                <a:solidFill>
-                  <a:srgbClr val="9AA7BD"/>
-                </a:solidFill>
-                <a:latin typeface="Calibri" pitchFamily="34" charset="0"/>
-                <a:ea typeface="Calibri" pitchFamily="34" charset="-122"/>
-                <a:cs typeface="Calibri" pitchFamily="34" charset="-120"/>
-              </a:rPr>
-              <a:t>Rendimiento Académico · Evaluación 1</a:t>
-            </a:r>
-            <a:endParaRPr lang="en-US" sz="900" dirty="0"/>
-          </a:p>
-        </p:txBody>
-      </p:sp>
-      <p:sp>
-        <p:nvSpPr>
-          <p:cNvPr id="9" name="Text 6"/>
-          <p:cNvSpPr/>
-          <p:nvPr/>
-        </p:nvSpPr>
-        <p:spPr>
-          <a:xfrm>
-            <a:off x="11365992" y="6400800"/>
-            <a:ext cx="548640" cy="320040"/>
-          </a:xfrm>
-          <a:prstGeom prst="rect">
-            <a:avLst/>
-          </a:prstGeom>
-          <a:noFill/>
-          <a:ln/>
-        </p:spPr>
-        <p:txBody>
-          <a:bodyPr wrap="square" rtlCol="0" anchor="ctr"/>
-          <a:lstStyle/>
-          <a:p>
-            <a:pPr marL="0" indent="0" algn="r">
-              <a:buNone/>
-            </a:pPr>
-            <a:r>
-              <a:rPr lang="en-US" sz="1000" dirty="0">
-                <a:solidFill>
-                  <a:srgbClr val="5B6B84"/>
-                </a:solidFill>
-                <a:latin typeface="Calibri" pitchFamily="34" charset="0"/>
-                <a:ea typeface="Calibri" pitchFamily="34" charset="-122"/>
-                <a:cs typeface="Calibri" pitchFamily="34" charset="-120"/>
-              </a:rPr>
-              <a:t>09</a:t>
-            </a:r>
-            <a:endParaRPr lang="en-US" sz="1000" dirty="0"/>
+              <a:t>Los </a:t>
+            </a:r>
+            <a:r>
+              <a:rPr lang="en-US" sz="1200" dirty="0" err="1">
+                <a:solidFill>
+                  <a:srgbClr val="33415C"/>
+                </a:solidFill>
+                <a:latin typeface="Calibri" pitchFamily="34" charset="0"/>
+                <a:ea typeface="Calibri" pitchFamily="34" charset="-122"/>
+                <a:cs typeface="Calibri" pitchFamily="34" charset="-120"/>
+              </a:rPr>
+              <a:t>gráficos</a:t>
+            </a:r>
+            <a:r>
+              <a:rPr lang="en-US" sz="1200" dirty="0">
+                <a:solidFill>
+                  <a:srgbClr val="33415C"/>
+                </a:solidFill>
+                <a:latin typeface="Calibri" pitchFamily="34" charset="0"/>
+                <a:ea typeface="Calibri" pitchFamily="34" charset="-122"/>
+                <a:cs typeface="Calibri" pitchFamily="34" charset="-120"/>
+              </a:rPr>
+              <a:t> de </a:t>
+            </a:r>
+            <a:r>
+              <a:rPr lang="en-US" sz="1200" dirty="0" err="1">
+                <a:solidFill>
+                  <a:srgbClr val="33415C"/>
+                </a:solidFill>
+                <a:latin typeface="Calibri" pitchFamily="34" charset="0"/>
+                <a:ea typeface="Calibri" pitchFamily="34" charset="-122"/>
+                <a:cs typeface="Calibri" pitchFamily="34" charset="-120"/>
+              </a:rPr>
+              <a:t>dispersión</a:t>
+            </a:r>
+            <a:r>
+              <a:rPr lang="en-US" sz="1200" dirty="0">
+                <a:solidFill>
+                  <a:srgbClr val="33415C"/>
+                </a:solidFill>
+                <a:latin typeface="Calibri" pitchFamily="34" charset="0"/>
+                <a:ea typeface="Calibri" pitchFamily="34" charset="-122"/>
+                <a:cs typeface="Calibri" pitchFamily="34" charset="-120"/>
+              </a:rPr>
+              <a:t> </a:t>
+            </a:r>
+            <a:r>
+              <a:rPr lang="en-US" sz="1200" dirty="0" err="1">
+                <a:solidFill>
+                  <a:srgbClr val="33415C"/>
+                </a:solidFill>
+                <a:latin typeface="Calibri" pitchFamily="34" charset="0"/>
+                <a:ea typeface="Calibri" pitchFamily="34" charset="-122"/>
+                <a:cs typeface="Calibri" pitchFamily="34" charset="-120"/>
+              </a:rPr>
+              <a:t>confirman</a:t>
+            </a:r>
+            <a:r>
+              <a:rPr lang="en-US" sz="1200" dirty="0">
+                <a:solidFill>
+                  <a:srgbClr val="33415C"/>
+                </a:solidFill>
+                <a:latin typeface="Calibri" pitchFamily="34" charset="0"/>
+                <a:ea typeface="Calibri" pitchFamily="34" charset="-122"/>
+                <a:cs typeface="Calibri" pitchFamily="34" charset="-120"/>
+              </a:rPr>
+              <a:t> </a:t>
+            </a:r>
+            <a:r>
+              <a:rPr lang="en-US" sz="1200" dirty="0" err="1">
+                <a:solidFill>
+                  <a:srgbClr val="33415C"/>
+                </a:solidFill>
+                <a:latin typeface="Calibri" pitchFamily="34" charset="0"/>
+                <a:ea typeface="Calibri" pitchFamily="34" charset="-122"/>
+                <a:cs typeface="Calibri" pitchFamily="34" charset="-120"/>
+              </a:rPr>
+              <a:t>una</a:t>
+            </a:r>
+            <a:r>
+              <a:rPr lang="en-US" sz="1200" dirty="0">
+                <a:solidFill>
+                  <a:srgbClr val="33415C"/>
+                </a:solidFill>
+                <a:latin typeface="Calibri" pitchFamily="34" charset="0"/>
+                <a:ea typeface="Calibri" pitchFamily="34" charset="-122"/>
+                <a:cs typeface="Calibri" pitchFamily="34" charset="-120"/>
+              </a:rPr>
+              <a:t> </a:t>
+            </a:r>
+            <a:r>
+              <a:rPr lang="en-US" sz="1200" dirty="0" err="1">
+                <a:solidFill>
+                  <a:srgbClr val="33415C"/>
+                </a:solidFill>
+                <a:latin typeface="Calibri" pitchFamily="34" charset="0"/>
+                <a:ea typeface="Calibri" pitchFamily="34" charset="-122"/>
+                <a:cs typeface="Calibri" pitchFamily="34" charset="-120"/>
+              </a:rPr>
+              <a:t>tendencia</a:t>
+            </a:r>
+            <a:r>
+              <a:rPr lang="en-US" sz="1200" dirty="0">
+                <a:solidFill>
+                  <a:srgbClr val="33415C"/>
+                </a:solidFill>
+                <a:latin typeface="Calibri" pitchFamily="34" charset="0"/>
+                <a:ea typeface="Calibri" pitchFamily="34" charset="-122"/>
+                <a:cs typeface="Calibri" pitchFamily="34" charset="-120"/>
+              </a:rPr>
+              <a:t> </a:t>
+            </a:r>
+            <a:r>
+              <a:rPr lang="en-US" sz="1200" dirty="0" err="1">
+                <a:solidFill>
+                  <a:srgbClr val="33415C"/>
+                </a:solidFill>
+                <a:latin typeface="Calibri" pitchFamily="34" charset="0"/>
+                <a:ea typeface="Calibri" pitchFamily="34" charset="-122"/>
+                <a:cs typeface="Calibri" pitchFamily="34" charset="-120"/>
+              </a:rPr>
+              <a:t>positiva</a:t>
+            </a:r>
+            <a:r>
+              <a:rPr lang="en-US" sz="1200" dirty="0">
+                <a:solidFill>
+                  <a:srgbClr val="33415C"/>
+                </a:solidFill>
+                <a:latin typeface="Calibri" pitchFamily="34" charset="0"/>
+                <a:ea typeface="Calibri" pitchFamily="34" charset="-122"/>
+                <a:cs typeface="Calibri" pitchFamily="34" charset="-120"/>
+              </a:rPr>
+              <a:t> y </a:t>
+            </a:r>
+            <a:r>
+              <a:rPr lang="en-US" sz="1200" dirty="0" err="1">
+                <a:solidFill>
+                  <a:srgbClr val="33415C"/>
+                </a:solidFill>
+                <a:latin typeface="Calibri" pitchFamily="34" charset="0"/>
+                <a:ea typeface="Calibri" pitchFamily="34" charset="-122"/>
+                <a:cs typeface="Calibri" pitchFamily="34" charset="-120"/>
+              </a:rPr>
+              <a:t>razonablemente</a:t>
+            </a:r>
+            <a:r>
+              <a:rPr lang="en-US" sz="1200" dirty="0">
+                <a:solidFill>
+                  <a:srgbClr val="33415C"/>
+                </a:solidFill>
+                <a:latin typeface="Calibri" pitchFamily="34" charset="0"/>
+                <a:ea typeface="Calibri" pitchFamily="34" charset="-122"/>
+                <a:cs typeface="Calibri" pitchFamily="34" charset="-120"/>
+              </a:rPr>
+              <a:t> lineal.</a:t>
+            </a:r>
+            <a:endParaRPr lang="en-US" sz="1200" dirty="0"/>
+          </a:p>
+          <a:p>
+            <a:endParaRPr lang="es-CL" dirty="0"/>
           </a:p>
         </p:txBody>
       </p:sp>
@@ -19075,4 +18779,26 @@
     </a:ext>
   </a:extLst>
 </a:theme>
+</file>
+
+<file path=ppt/webextensions/taskpanes.xml><?xml version="1.0" encoding="utf-8"?>
+<wetp:taskpanes xmlns:wetp="http://schemas.microsoft.com/office/webextensions/taskpanes/2010/11">
+  <wetp:taskpane dockstate="right" visibility="0" width="525" row="0">
+    <wetp:webextensionref xmlns:r="http://schemas.openxmlformats.org/officeDocument/2006/relationships" r:id="rId1"/>
+  </wetp:taskpane>
+</wetp:taskpanes>
+</file>
+
+<file path=ppt/webextensions/webextension1.xml><?xml version="1.0" encoding="utf-8"?>
+<we:webextension xmlns:we="http://schemas.microsoft.com/office/webextensions/webextension/2010/11" id="{A3F84343-D73F-4764-9EE2-D18B399E682E}">
+  <we:reference id="wa200010001" version="1.0.0.1" store="es-ES" storeType="OMEX"/>
+  <we:alternateReferences>
+    <we:reference id="wa200010001" version="1.0.0.1" store="wa200010001" storeType="OMEX"/>
+  </we:alternateReferences>
+  <we:properties>
+    <we:property name="claude.fileId" value="&quot;1d8d9561-b1a2-41a0-ba95-cb277ba65975&quot;"/>
+  </we:properties>
+  <we:bindings/>
+  <we:snapshot xmlns:r="http://schemas.openxmlformats.org/officeDocument/2006/relationships"/>
+</we:webextension>
 </file>